--- a/project/02_risc_v/C04_rv32i_cpu_r_type/이준형_rv32i_r_type.pptx
+++ b/project/02_risc_v/C04_rv32i_cpu_r_type/이준형_rv32i_r_type.pptx
@@ -270,7 +270,7 @@
           <a:p>
             <a:fld id="{6FAD3930-65C8-43FA-8080-9609EAB9FD3E}" type="datetimeFigureOut">
               <a:rPr lang="ko-KR" altLang="en-US" smtClean="0"/>
-              <a:t>2026-03-08</a:t>
+              <a:t>2026-03-09</a:t>
             </a:fld>
             <a:endParaRPr lang="ko-KR" altLang="en-US"/>
           </a:p>
@@ -468,7 +468,7 @@
           <a:p>
             <a:fld id="{6FAD3930-65C8-43FA-8080-9609EAB9FD3E}" type="datetimeFigureOut">
               <a:rPr lang="ko-KR" altLang="en-US" smtClean="0"/>
-              <a:t>2026-03-08</a:t>
+              <a:t>2026-03-09</a:t>
             </a:fld>
             <a:endParaRPr lang="ko-KR" altLang="en-US"/>
           </a:p>
@@ -676,7 +676,7 @@
           <a:p>
             <a:fld id="{6FAD3930-65C8-43FA-8080-9609EAB9FD3E}" type="datetimeFigureOut">
               <a:rPr lang="ko-KR" altLang="en-US" smtClean="0"/>
-              <a:t>2026-03-08</a:t>
+              <a:t>2026-03-09</a:t>
             </a:fld>
             <a:endParaRPr lang="ko-KR" altLang="en-US"/>
           </a:p>
@@ -874,7 +874,7 @@
           <a:p>
             <a:fld id="{6FAD3930-65C8-43FA-8080-9609EAB9FD3E}" type="datetimeFigureOut">
               <a:rPr lang="ko-KR" altLang="en-US" smtClean="0"/>
-              <a:t>2026-03-08</a:t>
+              <a:t>2026-03-09</a:t>
             </a:fld>
             <a:endParaRPr lang="ko-KR" altLang="en-US"/>
           </a:p>
@@ -1149,7 +1149,7 @@
           <a:p>
             <a:fld id="{6FAD3930-65C8-43FA-8080-9609EAB9FD3E}" type="datetimeFigureOut">
               <a:rPr lang="ko-KR" altLang="en-US" smtClean="0"/>
-              <a:t>2026-03-08</a:t>
+              <a:t>2026-03-09</a:t>
             </a:fld>
             <a:endParaRPr lang="ko-KR" altLang="en-US"/>
           </a:p>
@@ -1414,7 +1414,7 @@
           <a:p>
             <a:fld id="{6FAD3930-65C8-43FA-8080-9609EAB9FD3E}" type="datetimeFigureOut">
               <a:rPr lang="ko-KR" altLang="en-US" smtClean="0"/>
-              <a:t>2026-03-08</a:t>
+              <a:t>2026-03-09</a:t>
             </a:fld>
             <a:endParaRPr lang="ko-KR" altLang="en-US"/>
           </a:p>
@@ -1826,7 +1826,7 @@
           <a:p>
             <a:fld id="{6FAD3930-65C8-43FA-8080-9609EAB9FD3E}" type="datetimeFigureOut">
               <a:rPr lang="ko-KR" altLang="en-US" smtClean="0"/>
-              <a:t>2026-03-08</a:t>
+              <a:t>2026-03-09</a:t>
             </a:fld>
             <a:endParaRPr lang="ko-KR" altLang="en-US"/>
           </a:p>
@@ -1967,7 +1967,7 @@
           <a:p>
             <a:fld id="{6FAD3930-65C8-43FA-8080-9609EAB9FD3E}" type="datetimeFigureOut">
               <a:rPr lang="ko-KR" altLang="en-US" smtClean="0"/>
-              <a:t>2026-03-08</a:t>
+              <a:t>2026-03-09</a:t>
             </a:fld>
             <a:endParaRPr lang="ko-KR" altLang="en-US"/>
           </a:p>
@@ -2080,7 +2080,7 @@
           <a:p>
             <a:fld id="{6FAD3930-65C8-43FA-8080-9609EAB9FD3E}" type="datetimeFigureOut">
               <a:rPr lang="ko-KR" altLang="en-US" smtClean="0"/>
-              <a:t>2026-03-08</a:t>
+              <a:t>2026-03-09</a:t>
             </a:fld>
             <a:endParaRPr lang="ko-KR" altLang="en-US"/>
           </a:p>
@@ -2391,7 +2391,7 @@
           <a:p>
             <a:fld id="{6FAD3930-65C8-43FA-8080-9609EAB9FD3E}" type="datetimeFigureOut">
               <a:rPr lang="ko-KR" altLang="en-US" smtClean="0"/>
-              <a:t>2026-03-08</a:t>
+              <a:t>2026-03-09</a:t>
             </a:fld>
             <a:endParaRPr lang="ko-KR" altLang="en-US"/>
           </a:p>
@@ -2679,7 +2679,7 @@
           <a:p>
             <a:fld id="{6FAD3930-65C8-43FA-8080-9609EAB9FD3E}" type="datetimeFigureOut">
               <a:rPr lang="ko-KR" altLang="en-US" smtClean="0"/>
-              <a:t>2026-03-08</a:t>
+              <a:t>2026-03-09</a:t>
             </a:fld>
             <a:endParaRPr lang="ko-KR" altLang="en-US"/>
           </a:p>
@@ -2920,7 +2920,7 @@
           <a:p>
             <a:fld id="{6FAD3930-65C8-43FA-8080-9609EAB9FD3E}" type="datetimeFigureOut">
               <a:rPr lang="ko-KR" altLang="en-US" smtClean="0"/>
-              <a:t>2026-03-08</a:t>
+              <a:t>2026-03-09</a:t>
             </a:fld>
             <a:endParaRPr lang="ko-KR" altLang="en-US"/>
           </a:p>
@@ -3493,7 +3493,11 @@
           <a:p>
             <a:r>
               <a:rPr lang="en-US" altLang="ko-KR" dirty="0"/>
-              <a:t>2.Simulation</a:t>
+              <a:t>3</a:t>
+            </a:r>
+            <a:r>
+              <a:rPr lang="en-US" altLang="ko-KR" dirty="0" smtClean="0"/>
+              <a:t>.Simulation</a:t>
             </a:r>
             <a:endParaRPr lang="ko-KR" altLang="en-US" dirty="0"/>
           </a:p>
@@ -4221,7 +4225,11 @@
           <a:p>
             <a:r>
               <a:rPr lang="en-US" altLang="ko-KR" dirty="0"/>
-              <a:t>2.Simulation</a:t>
+              <a:t>3</a:t>
+            </a:r>
+            <a:r>
+              <a:rPr lang="en-US" altLang="ko-KR" dirty="0" smtClean="0"/>
+              <a:t>.Simulation</a:t>
             </a:r>
             <a:endParaRPr lang="ko-KR" altLang="en-US" dirty="0"/>
           </a:p>
@@ -4919,7 +4927,11 @@
           <a:p>
             <a:r>
               <a:rPr lang="en-US" altLang="ko-KR" dirty="0"/>
-              <a:t>2.Simulation</a:t>
+              <a:t>3</a:t>
+            </a:r>
+            <a:r>
+              <a:rPr lang="en-US" altLang="ko-KR" dirty="0" smtClean="0"/>
+              <a:t>.Simulation</a:t>
             </a:r>
             <a:endParaRPr lang="ko-KR" altLang="en-US" dirty="0"/>
           </a:p>
@@ -5743,12 +5755,117 @@
           </a:p>
         </p:txBody>
       </p:sp>
+      <p:sp>
+        <p:nvSpPr>
+          <p:cNvPr id="6" name="TextBox 5">
+            <a:extLst>
+              <a:ext uri="{FF2B5EF4-FFF2-40B4-BE49-F238E27FC236}">
+                <a16:creationId xmlns:a16="http://schemas.microsoft.com/office/drawing/2014/main" id="{A3812FBB-2226-7B8C-FBA6-9258965EAF68}"/>
+              </a:ext>
+            </a:extLst>
+          </p:cNvPr>
+          <p:cNvSpPr txBox="1"/>
+          <p:nvPr/>
+        </p:nvSpPr>
+        <p:spPr>
+          <a:xfrm>
+            <a:off x="6025487" y="5158854"/>
+            <a:ext cx="5807122" cy="1200329"/>
+          </a:xfrm>
+          <a:prstGeom prst="rect">
+            <a:avLst/>
+          </a:prstGeom>
+          <a:noFill/>
+        </p:spPr>
+        <p:txBody>
+          <a:bodyPr wrap="square" rtlCol="0">
+            <a:spAutoFit/>
+          </a:bodyPr>
+          <a:lstStyle/>
+          <a:p>
+            <a:r>
+              <a:rPr lang="en-US" altLang="ko-KR" dirty="0" err="1"/>
+              <a:t>Alu_control</a:t>
+            </a:r>
+            <a:r>
+              <a:rPr lang="en-US" altLang="ko-KR" dirty="0"/>
+              <a:t> </a:t>
+            </a:r>
+            <a:r>
+              <a:rPr lang="ko-KR" altLang="en-US" dirty="0"/>
+              <a:t>동작 기준</a:t>
+            </a:r>
+            <a:endParaRPr lang="en-US" altLang="ko-KR" dirty="0"/>
+          </a:p>
+          <a:p>
+            <a:pPr marL="342900" indent="-342900">
+              <a:buAutoNum type="arabicPeriod"/>
+            </a:pPr>
+            <a:r>
+              <a:rPr lang="en-US" altLang="ko-KR" dirty="0"/>
+              <a:t>Opcode == </a:t>
+            </a:r>
+            <a:r>
+              <a:rPr lang="en-US" altLang="ko-KR" dirty="0" err="1"/>
+              <a:t>R_type</a:t>
+            </a:r>
+            <a:endParaRPr lang="en-US" altLang="ko-KR" dirty="0"/>
+          </a:p>
+          <a:p>
+            <a:pPr marL="342900" indent="-342900">
+              <a:buAutoNum type="arabicPeriod"/>
+            </a:pPr>
+            <a:r>
+              <a:rPr lang="en-US" altLang="ko-KR" dirty="0"/>
+              <a:t>Funct3</a:t>
+            </a:r>
+            <a:r>
+              <a:rPr lang="ko-KR" altLang="en-US" dirty="0"/>
+              <a:t>로 </a:t>
+            </a:r>
+            <a:r>
+              <a:rPr lang="en-US" altLang="ko-KR" dirty="0"/>
+              <a:t>alu </a:t>
+            </a:r>
+            <a:r>
+              <a:rPr lang="ko-KR" altLang="en-US" dirty="0"/>
+              <a:t>연산 동작 결정</a:t>
+            </a:r>
+            <a:endParaRPr lang="en-US" altLang="ko-KR" dirty="0"/>
+          </a:p>
+          <a:p>
+            <a:pPr marL="342900" indent="-342900">
+              <a:buAutoNum type="arabicPeriod"/>
+            </a:pPr>
+            <a:r>
+              <a:rPr lang="en-US" altLang="ko-KR" dirty="0"/>
+              <a:t>Funct7[5]</a:t>
+            </a:r>
+            <a:r>
+              <a:rPr lang="ko-KR" altLang="en-US" dirty="0"/>
+              <a:t>로 </a:t>
+            </a:r>
+            <a:r>
+              <a:rPr lang="en-US" altLang="ko-KR" dirty="0"/>
+              <a:t>(ADD or SUB), (SRL or SRA) </a:t>
+            </a:r>
+            <a:r>
+              <a:rPr lang="ko-KR" altLang="en-US" dirty="0"/>
+              <a:t>기능 분리</a:t>
+            </a:r>
+            <a:r>
+              <a:rPr lang="en-US" altLang="ko-KR" dirty="0"/>
+              <a:t> </a:t>
+            </a:r>
+          </a:p>
+        </p:txBody>
+      </p:sp>
       <p:pic>
         <p:nvPicPr>
-          <p:cNvPr id="4" name="그림 3">
-            <a:extLst>
-              <a:ext uri="{FF2B5EF4-FFF2-40B4-BE49-F238E27FC236}">
-                <a16:creationId xmlns:a16="http://schemas.microsoft.com/office/drawing/2014/main" id="{466A1B8D-1826-E8F6-84B1-CEF572BAC8D9}"/>
+          <p:cNvPr id="7" name="그림 6">
+            <a:extLst>
+              <a:ext uri="{FF2B5EF4-FFF2-40B4-BE49-F238E27FC236}">
+                <a16:creationId xmlns:a16="http://schemas.microsoft.com/office/drawing/2014/main" id="{F5D63878-A459-6D64-1945-4C3CD5F03727}"/>
               </a:ext>
             </a:extLst>
           </p:cNvPr>
@@ -5765,128 +5882,17 @@
         </p:blipFill>
         <p:spPr>
           <a:xfrm>
-            <a:off x="5678113" y="891679"/>
-            <a:ext cx="6049219" cy="3696216"/>
+            <a:off x="671220" y="2134911"/>
+            <a:ext cx="4196204" cy="4224272"/>
           </a:xfrm>
           <a:prstGeom prst="rect">
             <a:avLst/>
           </a:prstGeom>
         </p:spPr>
       </p:pic>
-      <p:sp>
-        <p:nvSpPr>
-          <p:cNvPr id="6" name="TextBox 5">
-            <a:extLst>
-              <a:ext uri="{FF2B5EF4-FFF2-40B4-BE49-F238E27FC236}">
-                <a16:creationId xmlns:a16="http://schemas.microsoft.com/office/drawing/2014/main" id="{A3812FBB-2226-7B8C-FBA6-9258965EAF68}"/>
-              </a:ext>
-            </a:extLst>
-          </p:cNvPr>
-          <p:cNvSpPr txBox="1"/>
-          <p:nvPr/>
-        </p:nvSpPr>
-        <p:spPr>
-          <a:xfrm>
-            <a:off x="6025487" y="5158854"/>
-            <a:ext cx="5807122" cy="1200329"/>
-          </a:xfrm>
-          <a:prstGeom prst="rect">
-            <a:avLst/>
-          </a:prstGeom>
-          <a:noFill/>
-        </p:spPr>
-        <p:txBody>
-          <a:bodyPr wrap="square" rtlCol="0">
-            <a:spAutoFit/>
-          </a:bodyPr>
-          <a:lstStyle/>
-          <a:p>
-            <a:r>
-              <a:rPr lang="en-US" altLang="ko-KR" dirty="0" err="1"/>
-              <a:t>Alu_control</a:t>
-            </a:r>
-            <a:r>
-              <a:rPr lang="en-US" altLang="ko-KR" dirty="0"/>
-              <a:t> </a:t>
-            </a:r>
-            <a:r>
-              <a:rPr lang="ko-KR" altLang="en-US" dirty="0"/>
-              <a:t>동작 기준</a:t>
-            </a:r>
-            <a:endParaRPr lang="en-US" altLang="ko-KR" dirty="0"/>
-          </a:p>
-          <a:p>
-            <a:pPr marL="342900" indent="-342900">
-              <a:buAutoNum type="arabicPeriod"/>
-            </a:pPr>
-            <a:r>
-              <a:rPr lang="en-US" altLang="ko-KR" dirty="0"/>
-              <a:t>Opcode == </a:t>
-            </a:r>
-            <a:r>
-              <a:rPr lang="en-US" altLang="ko-KR" dirty="0" err="1"/>
-              <a:t>R_type</a:t>
-            </a:r>
-            <a:endParaRPr lang="en-US" altLang="ko-KR" dirty="0"/>
-          </a:p>
-          <a:p>
-            <a:pPr marL="342900" indent="-342900">
-              <a:buAutoNum type="arabicPeriod"/>
-            </a:pPr>
-            <a:r>
-              <a:rPr lang="en-US" altLang="ko-KR" dirty="0"/>
-              <a:t>Funct3</a:t>
-            </a:r>
-            <a:r>
-              <a:rPr lang="ko-KR" altLang="en-US" dirty="0"/>
-              <a:t>로 </a:t>
-            </a:r>
-            <a:r>
-              <a:rPr lang="en-US" altLang="ko-KR" dirty="0"/>
-              <a:t>alu </a:t>
-            </a:r>
-            <a:r>
-              <a:rPr lang="ko-KR" altLang="en-US" dirty="0"/>
-              <a:t>연산 동작 결정</a:t>
-            </a:r>
-            <a:endParaRPr lang="en-US" altLang="ko-KR" dirty="0"/>
-          </a:p>
-          <a:p>
-            <a:pPr marL="342900" indent="-342900">
-              <a:buAutoNum type="arabicPeriod"/>
-            </a:pPr>
-            <a:r>
-              <a:rPr lang="en-US" altLang="ko-KR" dirty="0"/>
-              <a:t>Funct7[5]</a:t>
-            </a:r>
-            <a:r>
-              <a:rPr lang="ko-KR" altLang="en-US" dirty="0"/>
-              <a:t>로 </a:t>
-            </a:r>
-            <a:r>
-              <a:rPr lang="en-US" altLang="ko-KR" dirty="0"/>
-              <a:t>(ADD or SUB), (SRL or SRA) </a:t>
-            </a:r>
-            <a:r>
-              <a:rPr lang="ko-KR" altLang="en-US" dirty="0"/>
-              <a:t>기능 분리</a:t>
-            </a:r>
-            <a:r>
-              <a:rPr lang="en-US" altLang="ko-KR" dirty="0"/>
-              <a:t> </a:t>
-            </a:r>
-          </a:p>
-        </p:txBody>
-      </p:sp>
       <p:pic>
         <p:nvPicPr>
-          <p:cNvPr id="7" name="그림 6">
-            <a:extLst>
-              <a:ext uri="{FF2B5EF4-FFF2-40B4-BE49-F238E27FC236}">
-                <a16:creationId xmlns:a16="http://schemas.microsoft.com/office/drawing/2014/main" id="{F5D63878-A459-6D64-1945-4C3CD5F03727}"/>
-              </a:ext>
-            </a:extLst>
-          </p:cNvPr>
+          <p:cNvPr id="3" name="그림 2"/>
           <p:cNvPicPr>
             <a:picLocks noChangeAspect="1"/>
           </p:cNvPicPr>
@@ -5900,8 +5906,8 @@
         </p:blipFill>
         <p:spPr>
           <a:xfrm>
-            <a:off x="671220" y="2134911"/>
-            <a:ext cx="4196204" cy="4224272"/>
+            <a:off x="6214044" y="365125"/>
+            <a:ext cx="5430008" cy="3791479"/>
           </a:xfrm>
           <a:prstGeom prst="rect">
             <a:avLst/>
@@ -6401,7 +6407,11 @@
           <a:p>
             <a:r>
               <a:rPr lang="en-US" altLang="ko-KR" dirty="0"/>
-              <a:t>2.Simulation </a:t>
+              <a:t>3</a:t>
+            </a:r>
+            <a:r>
+              <a:rPr lang="en-US" altLang="ko-KR" dirty="0" smtClean="0"/>
+              <a:t>.Simulation </a:t>
             </a:r>
             <a:r>
               <a:rPr lang="ko-KR" altLang="en-US" dirty="0"/>
@@ -6410,36 +6420,6 @@
           </a:p>
         </p:txBody>
       </p:sp>
-      <p:pic>
-        <p:nvPicPr>
-          <p:cNvPr id="5" name="그림 4">
-            <a:extLst>
-              <a:ext uri="{FF2B5EF4-FFF2-40B4-BE49-F238E27FC236}">
-                <a16:creationId xmlns:a16="http://schemas.microsoft.com/office/drawing/2014/main" id="{C50E71BD-851E-E53A-6D26-F90E44BD042E}"/>
-              </a:ext>
-            </a:extLst>
-          </p:cNvPr>
-          <p:cNvPicPr>
-            <a:picLocks noChangeAspect="1"/>
-          </p:cNvPicPr>
-          <p:nvPr/>
-        </p:nvPicPr>
-        <p:blipFill>
-          <a:blip r:embed="rId2"/>
-          <a:stretch>
-            <a:fillRect/>
-          </a:stretch>
-        </p:blipFill>
-        <p:spPr>
-          <a:xfrm>
-            <a:off x="414618" y="1798539"/>
-            <a:ext cx="5249340" cy="4067743"/>
-          </a:xfrm>
-          <a:prstGeom prst="rect">
-            <a:avLst/>
-          </a:prstGeom>
-        </p:spPr>
-      </p:pic>
       <p:graphicFrame>
         <p:nvGraphicFramePr>
           <p:cNvPr id="10" name="표 9">
@@ -6910,7 +6890,7 @@
         </p:nvSpPr>
         <p:spPr>
           <a:xfrm>
-            <a:off x="7537077" y="3429000"/>
+            <a:off x="7998186" y="3181818"/>
             <a:ext cx="4316505" cy="3139321"/>
           </a:xfrm>
           <a:prstGeom prst="rect">
@@ -7076,6 +7056,138 @@
           </a:p>
         </p:txBody>
       </p:sp>
+      <p:pic>
+        <p:nvPicPr>
+          <p:cNvPr id="3" name="그림 2"/>
+          <p:cNvPicPr>
+            <a:picLocks noChangeAspect="1"/>
+          </p:cNvPicPr>
+          <p:nvPr/>
+        </p:nvPicPr>
+        <p:blipFill>
+          <a:blip r:embed="rId2"/>
+          <a:stretch>
+            <a:fillRect/>
+          </a:stretch>
+        </p:blipFill>
+        <p:spPr>
+          <a:xfrm>
+            <a:off x="241042" y="1522690"/>
+            <a:ext cx="3671596" cy="4918977"/>
+          </a:xfrm>
+          <a:prstGeom prst="rect">
+            <a:avLst/>
+          </a:prstGeom>
+        </p:spPr>
+      </p:pic>
+      <p:sp>
+        <p:nvSpPr>
+          <p:cNvPr id="8" name="TextBox 7">
+            <a:extLst>
+              <a:ext uri="{FF2B5EF4-FFF2-40B4-BE49-F238E27FC236}">
+                <a16:creationId xmlns:a16="http://schemas.microsoft.com/office/drawing/2014/main" id="{EAF745DD-948C-0084-EA6E-0AF7E31C1916}"/>
+              </a:ext>
+            </a:extLst>
+          </p:cNvPr>
+          <p:cNvSpPr txBox="1"/>
+          <p:nvPr/>
+        </p:nvSpPr>
+        <p:spPr>
+          <a:xfrm>
+            <a:off x="838200" y="6441667"/>
+            <a:ext cx="5382208" cy="369332"/>
+          </a:xfrm>
+          <a:prstGeom prst="rect">
+            <a:avLst/>
+          </a:prstGeom>
+          <a:noFill/>
+        </p:spPr>
+        <p:txBody>
+          <a:bodyPr wrap="square" rtlCol="0">
+            <a:spAutoFit/>
+          </a:bodyPr>
+          <a:lstStyle/>
+          <a:p>
+            <a:r>
+              <a:rPr lang="en-US" altLang="ko-KR" dirty="0" err="1" smtClean="0"/>
+              <a:t>clk</a:t>
+            </a:r>
+            <a:r>
+              <a:rPr lang="en-US" altLang="ko-KR" dirty="0" smtClean="0"/>
+              <a:t> </a:t>
+            </a:r>
+            <a:r>
+              <a:rPr lang="ko-KR" altLang="en-US" dirty="0" smtClean="0"/>
+              <a:t>마다 </a:t>
+            </a:r>
+            <a:r>
+              <a:rPr lang="en-US" altLang="ko-KR" dirty="0" smtClean="0"/>
+              <a:t>PC </a:t>
+            </a:r>
+            <a:r>
+              <a:rPr lang="ko-KR" altLang="en-US" dirty="0" smtClean="0"/>
+              <a:t>순서 대로 </a:t>
+            </a:r>
+            <a:r>
+              <a:rPr lang="en-US" altLang="ko-KR" dirty="0" smtClean="0"/>
+              <a:t>R-type </a:t>
+            </a:r>
+            <a:r>
+              <a:rPr lang="ko-KR" altLang="en-US" dirty="0" smtClean="0"/>
+              <a:t>순서대로 실행 확인</a:t>
+            </a:r>
+            <a:endParaRPr lang="en-US" altLang="ko-KR" dirty="0"/>
+          </a:p>
+        </p:txBody>
+      </p:sp>
+      <p:pic>
+        <p:nvPicPr>
+          <p:cNvPr id="4" name="그림 3"/>
+          <p:cNvPicPr>
+            <a:picLocks noChangeAspect="1"/>
+          </p:cNvPicPr>
+          <p:nvPr/>
+        </p:nvPicPr>
+        <p:blipFill>
+          <a:blip r:embed="rId3"/>
+          <a:stretch>
+            <a:fillRect/>
+          </a:stretch>
+        </p:blipFill>
+        <p:spPr>
+          <a:xfrm>
+            <a:off x="4049610" y="1522690"/>
+            <a:ext cx="3498412" cy="743054"/>
+          </a:xfrm>
+          <a:prstGeom prst="rect">
+            <a:avLst/>
+          </a:prstGeom>
+        </p:spPr>
+      </p:pic>
+      <p:pic>
+        <p:nvPicPr>
+          <p:cNvPr id="5" name="그림 4"/>
+          <p:cNvPicPr>
+            <a:picLocks noChangeAspect="1"/>
+          </p:cNvPicPr>
+          <p:nvPr/>
+        </p:nvPicPr>
+        <p:blipFill>
+          <a:blip r:embed="rId4"/>
+          <a:stretch>
+            <a:fillRect/>
+          </a:stretch>
+        </p:blipFill>
+        <p:spPr>
+          <a:xfrm>
+            <a:off x="4049610" y="2360659"/>
+            <a:ext cx="2248214" cy="2572109"/>
+          </a:xfrm>
+          <a:prstGeom prst="rect">
+            <a:avLst/>
+          </a:prstGeom>
+        </p:spPr>
+      </p:pic>
     </p:spTree>
     <p:extLst>
       <p:ext uri="{BB962C8B-B14F-4D97-AF65-F5344CB8AC3E}">
@@ -7135,7 +7247,11 @@
           <a:p>
             <a:r>
               <a:rPr lang="en-US" altLang="ko-KR" dirty="0"/>
-              <a:t>2.Simulation</a:t>
+              <a:t>3</a:t>
+            </a:r>
+            <a:r>
+              <a:rPr lang="en-US" altLang="ko-KR" dirty="0" smtClean="0"/>
+              <a:t>.Simulation</a:t>
             </a:r>
             <a:endParaRPr lang="ko-KR" altLang="en-US" dirty="0"/>
           </a:p>
@@ -7325,7 +7441,11 @@
           <a:p>
             <a:r>
               <a:rPr lang="en-US" altLang="ko-KR" dirty="0"/>
-              <a:t>2.Simulation</a:t>
+              <a:t>3</a:t>
+            </a:r>
+            <a:r>
+              <a:rPr lang="en-US" altLang="ko-KR" dirty="0" smtClean="0"/>
+              <a:t>.Simulation</a:t>
             </a:r>
             <a:endParaRPr lang="ko-KR" altLang="en-US" dirty="0"/>
           </a:p>
@@ -7978,7 +8098,11 @@
           <a:p>
             <a:r>
               <a:rPr lang="en-US" altLang="ko-KR" dirty="0"/>
-              <a:t>2.Simulation</a:t>
+              <a:t>3</a:t>
+            </a:r>
+            <a:r>
+              <a:rPr lang="en-US" altLang="ko-KR" dirty="0" smtClean="0"/>
+              <a:t>.Simulation</a:t>
             </a:r>
             <a:endParaRPr lang="ko-KR" altLang="en-US" dirty="0"/>
           </a:p>
